--- a/docs/free-rwe-resources/train-the-trainer/training/day-03-cohort-definitions/kit/Instructor-Deck-with-Notes.pptx
+++ b/docs/free-rwe-resources/train-the-trainer/training/day-03-cohort-definitions/kit/Instructor-Deck-with-Notes.pptx
@@ -521,7 +521,7 @@
           <a:lstStyle/>
           <a:p>
             <a:r>
-              <a:t>Key message: the difference between a 'list of patients with type 2 diabetes' and a proper cohort definition is the temporal logic — when they qualified, what prior exposure they had, and when they exit. This distinction is what makes OHDSI studies reproducible.</a:t>
+              <a:t>Key message: the difference between a 'list of patients with motor neuron disease' and a proper cohort definition is the temporal logic — when they qualified, what prior exposure they had, and when they exit. This distinction is what makes OHDSI studies reproducible.</a:t>
             </a:r>
           </a:p>
         </p:txBody>
@@ -731,7 +731,7 @@
           <a:lstStyle/>
           <a:p>
             <a:r>
-              <a:t>The 'exclusion as inclusion' syntax confuses many new users. Walk through an example: 'exclude patients with prior insulin' becomes 'require that the count of insulin exposures in the prior 365 days is exactly 0.'</a:t>
+              <a:t>The 'exclusion as inclusion' syntax confuses many new users. Walk through an example: 'exclude patients with prior edaravone' becomes 'require that the count of edaravone exposures in the prior 365 days is exactly 0.'</a:t>
             </a:r>
           </a:p>
         </p:txBody>
@@ -942,6 +942,76 @@
           <a:p>
             <a:r>
               <a:t>Reconciliation exercise: have each participant run the count query and compare to the Atlas UI number. If they differ, work through the checklist: same CDM? Same schema? Same cohort_definition_id?</a:t>
+            </a:r>
+          </a:p>
+        </p:txBody>
+      </p:sp>
+      <p:sp>
+        <p:nvSpPr>
+          <p:cNvPr id="4" name="Slide Number Placeholder 3"/>
+          <p:cNvSpPr>
+            <a:spLocks noGrp="1"/>
+          </p:cNvSpPr>
+          <p:nvPr>
+            <p:ph type="sldNum" idx="5" sz="quarter"/>
+          </p:nvPr>
+        </p:nvSpPr>
+        <p:spPr/>
+      </p:sp>
+    </p:spTree>
+  </p:cSld>
+  <p:clrMapOvr>
+    <a:masterClrMapping/>
+  </p:clrMapOvr>
+</p:notes>
+</file>
+
+<file path=ppt/notesSlides/notesSlide8.xml><?xml version="1.0" encoding="utf-8"?>
+<p:notes xmlns:a="http://schemas.openxmlformats.org/drawingml/2006/main" xmlns:p="http://schemas.openxmlformats.org/presentationml/2006/main" xmlns:r="http://schemas.openxmlformats.org/officeDocument/2006/relationships">
+  <p:cSld>
+    <p:spTree>
+      <p:nvGrpSpPr>
+        <p:cNvPr id="1" name=""/>
+        <p:cNvGrpSpPr/>
+        <p:nvPr/>
+      </p:nvGrpSpPr>
+      <p:grpSpPr>
+        <a:xfrm>
+          <a:off x="0" y="0"/>
+          <a:ext cx="0" cy="0"/>
+          <a:chOff x="0" y="0"/>
+          <a:chExt cx="0" cy="0"/>
+        </a:xfrm>
+      </p:grpSpPr>
+      <p:sp>
+        <p:nvSpPr>
+          <p:cNvPr id="2" name="Slide Image Placeholder 1"/>
+          <p:cNvSpPr>
+            <a:spLocks noGrp="1"/>
+          </p:cNvSpPr>
+          <p:nvPr>
+            <p:ph type="sldImg" idx="2"/>
+          </p:nvPr>
+        </p:nvSpPr>
+        <p:spPr/>
+      </p:sp>
+      <p:sp>
+        <p:nvSpPr>
+          <p:cNvPr id="3" name="Notes Placeholder 2"/>
+          <p:cNvSpPr>
+            <a:spLocks noGrp="1"/>
+          </p:cNvSpPr>
+          <p:nvPr>
+            <p:ph type="body" idx="3" sz="quarter"/>
+          </p:nvPr>
+        </p:nvSpPr>
+        <p:spPr/>
+        <p:txBody>
+          <a:bodyPr/>
+          <a:lstStyle/>
+          <a:p>
+            <a:r>
+              <a:t>If your site has structured ALSFRS-R scores, add them to the characterization and look at how many cohort members have one near index. If the scores are kept in notes, the characterization will show none. Read that as a finding about data capture, not about the patients.</a:t>
             </a:r>
           </a:p>
         </p:txBody>
@@ -4075,7 +4145,7 @@
           <a:p>
             <a:pPr/>
             <a:r>
-              <a:t>Examples: first drug exposure to metformin · first ALS diagnosis · first inpatient hospitalization</a:t>
+              <a:t>Examples: first drug exposure to riluzole · first motor neuron disease diagnosis · first inpatient hospitalization</a:t>
             </a:r>
           </a:p>
           <a:p>
@@ -4294,7 +4364,7 @@
             <a:pPr lvl="1"/>
             <a:r>
               <a:rPr sz="1600"/>
-              <a:t>'No prior insulin exposure in the 365 days before index'</a:t>
+              <a:t>'No prior edaravone exposure in the 365 days before index'</a:t>
             </a:r>
           </a:p>
           <a:p>
@@ -4308,14 +4378,14 @@
             <a:pPr lvl="1"/>
             <a:r>
               <a:rPr sz="1600"/>
-              <a:t>'At least one type 2 diabetes diagnosis in the 365 days before index'</a:t>
+              <a:t>'At least one motor neuron disease diagnosis on or before index'</a:t>
             </a:r>
           </a:p>
           <a:p>
             <a:pPr/>
             <a:r>
               <a:rPr sz="1800"/>
-              <a:t>Exclusions are written as inclusions: 'no prior insulin' = 'count of prior insulin exposures = 0'</a:t>
+              <a:t>Exclusions are written as inclusions: 'no prior edaravone' = 'count of prior edaravone exposures = 0'</a:t>
             </a:r>
           </a:p>
           <a:p>
@@ -4608,7 +4678,7 @@
           <a:lstStyle/>
           <a:p>
             <a:r>
-              <a:t>Lab:  Live Demo: New-User Metformin Cohort in ATLAS</a:t>
+              <a:t>Lab:  Live Demo: New-User Riluzole Cohort in ATLAS</a:t>
             </a:r>
           </a:p>
         </p:txBody>
@@ -4656,7 +4726,7 @@
             </a:pPr>
             <a:r>
               <a:rPr sz="1800"/>
-              <a:t>2. Entry event: Drug Exposure · concept set = Metformin (from Day 2) · restrict to FIRST event</a:t>
+              <a:t>2. Entry event: Drug Exposure · concept set = riluzole (from Day 2) · restrict to FIRST event</a:t>
             </a:r>
           </a:p>
           <a:p>
@@ -4674,7 +4744,7 @@
             </a:pPr>
             <a:r>
               <a:rPr sz="1800"/>
-              <a:t>4. Inclusion rule: 'No prior sulfonylurea' (exactly 0 drug exposures in the 365 days before index)</a:t>
+              <a:t>4. Inclusion rule: 'Motor neuron disease diagnosis on or before index' (at least 1 condition occurrence from the Motor neuron disease concept set)</a:t>
             </a:r>
           </a:p>
           <a:p>
@@ -4911,21 +4981,21 @@
             <a:pPr lvl="1"/>
             <a:r>
               <a:rPr sz="1600"/>
-              <a:t>Demographics: does the age/sex distribution match what you'd expect for new metformin users?</a:t>
+              <a:t>Demographics: does the age/sex distribution match what you'd expect for new riluzole users?</a:t>
             </a:r>
           </a:p>
           <a:p>
             <a:pPr lvl="1"/>
             <a:r>
               <a:rPr sz="1600"/>
-              <a:t>Prior conditions: is type 2 diabetes among the most frequent? Metformin is recorded for other reasons too, so compare with what you know about your site</a:t>
+              <a:t>Prior conditions: is motor neuron disease among the most frequent? Note how many people have no such diagnosis before index, and ask why</a:t>
             </a:r>
           </a:p>
           <a:p>
             <a:pPr lvl="1"/>
             <a:r>
               <a:rPr sz="1600"/>
-              <a:t>Prior drugs: are other antidiabetic drugs common at baseline? (depends on your design)</a:t>
+              <a:t>Prior drugs: is edaravone or another ALS medication recorded before index? (depends on your design)</a:t>
             </a:r>
           </a:p>
           <a:p>
@@ -5782,7 +5852,7 @@
                             <a:srgbClr val="000000"/>
                           </a:solidFill>
                         </a:rPr>
-                        <a:t>Live demo: building new-user metformin cohort in ATLAS</a:t>
+                        <a:t>Live demo: building a new-user riluzole cohort in ATLAS</a:t>
                       </a:r>
                     </a:p>
                   </a:txBody>
